--- a/output/clevertap_proposal_kr_v5.pptx
+++ b/output/clevertap_proposal_kr_v5.pptx
@@ -3191,7 +3191,7 @@
       </p:sp>
       <p:pic>
         <p:nvPicPr>
-          <p:cNvPr id="4" name="Picture 3" descr="ctx_main.png"/>
+          <p:cNvPr id="4" name="Picture 3" descr="ctx_cover.png"/>
           <p:cNvPicPr>
             <a:picLocks noChangeAspect="1"/>
           </p:cNvPicPr>
@@ -4847,7 +4847,7 @@
       </p:sp>
       <p:pic>
         <p:nvPicPr>
-          <p:cNvPr id="27" name="Picture 26" descr="ctx_ai.png"/>
+          <p:cNvPr id="27" name="Picture 26" descr="ctx_ai2.png"/>
           <p:cNvPicPr>
             <a:picLocks noChangeAspect="1"/>
           </p:cNvPicPr>
@@ -4899,7 +4899,7 @@
                 </a:solidFill>
                 <a:latin typeface="Malgun Gothic"/>
               </a:rPr>
-              <a:t>clevertap.com/clevertap-ai — CleverAI™ Strategy Agents</a:t>
+              <a:t>clevertap.com/ai — CleverAI Decisioning Engine</a:t>
             </a:r>
           </a:p>
         </p:txBody>
@@ -6086,7 +6086,7 @@
       </p:sp>
       <p:pic>
         <p:nvPicPr>
-          <p:cNvPr id="32" name="Picture 31" descr="scan_prod_2000.png"/>
+          <p:cNvPr id="32" name="Picture 31" descr="ctx_ab.png"/>
           <p:cNvPicPr>
             <a:picLocks noChangeAspect="1"/>
           </p:cNvPicPr>
@@ -6138,7 +6138,7 @@
                 </a:solidFill>
                 <a:latin typeface="Malgun Gothic"/>
               </a:rPr>
-              <a:t>clevertap.com/product — Experimentation &amp; Optimization</a:t>
+              <a:t>clevertap.com/ab-testing — A/B 실험 설정</a:t>
             </a:r>
           </a:p>
         </p:txBody>
@@ -7298,7 +7298,7 @@
       </p:sp>
       <p:pic>
         <p:nvPicPr>
-          <p:cNvPr id="31" name="Picture 30" descr="ctx_fintech.png"/>
+          <p:cNvPr id="31" name="Picture 30" descr="ctx_analytics2.png"/>
           <p:cNvPicPr>
             <a:picLocks noChangeAspect="1"/>
           </p:cNvPicPr>
@@ -7350,7 +7350,7 @@
                 </a:solidFill>
                 <a:latin typeface="Malgun Gothic"/>
               </a:rPr>
-              <a:t>clevertap.com/financial-services — 핀테크/뱅킹 솔루션</a:t>
+              <a:t>clevertap.com/solutions/fintech — 핀테크 활용 사례</a:t>
             </a:r>
           </a:p>
         </p:txBody>
@@ -9823,7 +9823,7 @@
                 </a:solidFill>
                 <a:latin typeface="Malgun Gothic"/>
               </a:rPr>
-              <a:t>✅  전담 CSM 배정  |  한국어 기술 지원  |  24/7 모니터링  |  온보딩 플레이북 제공</a:t>
+              <a:t>전담 CSM 배정  |  한국어 기술 지원  |  24/7 모니터링  |  온보딩 플레이북 제공</a:t>
             </a:r>
           </a:p>
         </p:txBody>
@@ -10231,7 +10231,7 @@
                 </a:solidFill>
                 <a:latin typeface="Malgun Gothic"/>
               </a:rPr>
-              <a:t>✓  핵심 분석 기능</a:t>
+              <a:t>  핵심 분석 기능</a:t>
             </a:r>
           </a:p>
         </p:txBody>
@@ -10266,7 +10266,7 @@
                 </a:solidFill>
                 <a:latin typeface="Malgun Gothic"/>
               </a:rPr>
-              <a:t>✓  푸시 + 이메일</a:t>
+              <a:t>  푸시 + 이메일</a:t>
             </a:r>
           </a:p>
         </p:txBody>
@@ -10301,7 +10301,7 @@
                 </a:solidFill>
                 <a:latin typeface="Malgun Gothic"/>
               </a:rPr>
-              <a:t>✓  기본 세그멘테이션</a:t>
+              <a:t>  기본 세그멘테이션</a:t>
             </a:r>
           </a:p>
         </p:txBody>
@@ -10336,7 +10336,7 @@
                 </a:solidFill>
                 <a:latin typeface="Malgun Gothic"/>
               </a:rPr>
-              <a:t>✓  이메일 지원</a:t>
+              <a:t>  이메일 지원</a:t>
             </a:r>
           </a:p>
         </p:txBody>
@@ -10605,7 +10605,7 @@
                 </a:solidFill>
                 <a:latin typeface="Malgun Gothic"/>
               </a:rPr>
-              <a:t>✓  Essentials 전체</a:t>
+              <a:t>  Essentials 전체</a:t>
             </a:r>
           </a:p>
         </p:txBody>
@@ -10640,7 +10640,7 @@
                 </a:solidFill>
                 <a:latin typeface="Malgun Gothic"/>
               </a:rPr>
-              <a:t>✓  AI 예측 세그먼트</a:t>
+              <a:t>  AI 예측 세그먼트</a:t>
             </a:r>
           </a:p>
         </p:txBody>
@@ -10675,7 +10675,7 @@
                 </a:solidFill>
                 <a:latin typeface="Malgun Gothic"/>
               </a:rPr>
-              <a:t>✓  멀티채널 전체</a:t>
+              <a:t>  멀티채널 전체</a:t>
             </a:r>
           </a:p>
         </p:txBody>
@@ -10710,7 +10710,7 @@
                 </a:solidFill>
                 <a:latin typeface="Malgun Gothic"/>
               </a:rPr>
-              <a:t>✓  전담 CSM</a:t>
+              <a:t>  전담 CSM</a:t>
             </a:r>
           </a:p>
         </p:txBody>
@@ -10901,7 +10901,7 @@
                 </a:solidFill>
                 <a:latin typeface="Malgun Gothic"/>
               </a:rPr>
-              <a:t>✓  Advanced 전체</a:t>
+              <a:t>  Advanced 전체</a:t>
             </a:r>
           </a:p>
         </p:txBody>
@@ -10936,7 +10936,7 @@
                 </a:solidFill>
                 <a:latin typeface="Malgun Gothic"/>
               </a:rPr>
-              <a:t>✓  커스텀 SLA</a:t>
+              <a:t>  커스텀 SLA</a:t>
             </a:r>
           </a:p>
         </p:txBody>
@@ -10971,7 +10971,7 @@
                 </a:solidFill>
                 <a:latin typeface="Malgun Gothic"/>
               </a:rPr>
-              <a:t>✓  온프레미스 옵션</a:t>
+              <a:t>  온프레미스 옵션</a:t>
             </a:r>
           </a:p>
         </p:txBody>
@@ -11006,7 +11006,7 @@
                 </a:solidFill>
                 <a:latin typeface="Malgun Gothic"/>
               </a:rPr>
-              <a:t>✓  전용 인프라</a:t>
+              <a:t>  전용 인프라</a:t>
             </a:r>
           </a:p>
         </p:txBody>
@@ -11041,7 +11041,7 @@
                 </a:solidFill>
                 <a:latin typeface="Malgun Gothic"/>
               </a:rPr>
-              <a:t>다음 단계:  ① POC 범위 확정  →  ② 2주 무료 파일럿  →  ③ 맞춤 견적  →  ④ 계약 및 온보딩</a:t>
+              <a:t>다음 단계:  1) POC 범위 확정  -&gt;  2) 2주 무료 파일럿  -&gt;  3) 맞춤 견적  -&gt;  4) 계약 및 온보딩</a:t>
             </a:r>
           </a:p>
         </p:txBody>
@@ -14543,7 +14543,7 @@
       </p:sp>
       <p:pic>
         <p:nvPicPr>
-          <p:cNvPr id="32" name="Picture 31" descr="ctx_product_overview.png"/>
+          <p:cNvPr id="32" name="Picture 31" descr="ctx_intro.png"/>
           <p:cNvPicPr>
             <a:picLocks noChangeAspect="1"/>
           </p:cNvPicPr>
@@ -14595,7 +14595,7 @@
                 </a:solidFill>
                 <a:latin typeface="Malgun Gothic"/>
               </a:rPr>
-              <a:t>clevertap.com/product — 제품 개요</a:t>
+              <a:t>clevertap.com/product — 올인원 플랫폼 개요</a:t>
             </a:r>
           </a:p>
         </p:txBody>
@@ -19474,7 +19474,7 @@
       </p:sp>
       <p:pic>
         <p:nvPicPr>
-          <p:cNvPr id="27" name="Picture 26" descr="ctx_analytics.png"/>
+          <p:cNvPr id="27" name="Picture 26" descr="ctx_analytics2.png"/>
           <p:cNvPicPr>
             <a:picLocks noChangeAspect="1"/>
           </p:cNvPicPr>
@@ -19526,7 +19526,7 @@
                 </a:solidFill>
                 <a:latin typeface="Malgun Gothic"/>
               </a:rPr>
-              <a:t>clevertap.com/product — Customer Data and Analytics</a:t>
+              <a:t>clevertap.com/customer-data-and-analytics — 분석 대시보드</a:t>
             </a:r>
           </a:p>
         </p:txBody>
@@ -20378,7 +20378,7 @@
       </p:sp>
       <p:pic>
         <p:nvPicPr>
-          <p:cNvPr id="23" name="Picture 22" descr="ctx_segmentation.png"/>
+          <p:cNvPr id="23" name="Picture 22" descr="ctx_segmentation2.png"/>
           <p:cNvPicPr>
             <a:picLocks noChangeAspect="1"/>
           </p:cNvPicPr>
@@ -20430,7 +20430,7 @@
                 </a:solidFill>
                 <a:latin typeface="Malgun Gothic"/>
               </a:rPr>
-              <a:t>clevertap.com/product/segments — 세그멘테이션 UI</a:t>
+              <a:t>clevertap.com/segmentation — 세그멘테이션 빌더</a:t>
             </a:r>
           </a:p>
         </p:txBody>
@@ -21590,7 +21590,7 @@
       </p:sp>
       <p:pic>
         <p:nvPicPr>
-          <p:cNvPr id="31" name="Picture 30" descr="ctx_engagement.png"/>
+          <p:cNvPr id="31" name="Picture 30" descr="ctx_engagement2.png"/>
           <p:cNvPicPr>
             <a:picLocks noChangeAspect="1"/>
           </p:cNvPicPr>
@@ -21642,7 +21642,7 @@
                 </a:solidFill>
                 <a:latin typeface="Malgun Gothic"/>
               </a:rPr>
-              <a:t>clevertap.com/product/omnichannel-engagement — 멀티채널</a:t>
+              <a:t>clevertap.com/omnichannel-engagement — 캠페인 실행 화면</a:t>
             </a:r>
           </a:p>
         </p:txBody>

--- a/output/clevertap_proposal_kr_v5.pptx
+++ b/output/clevertap_proposal_kr_v5.pptx
@@ -3191,7 +3191,7 @@
       </p:sp>
       <p:pic>
         <p:nvPicPr>
-          <p:cNvPr id="4" name="Picture 3" descr="ctx_cover.png"/>
+          <p:cNvPr id="4" name="Picture 3" descr="screenshot_main.png"/>
           <p:cNvPicPr>
             <a:picLocks noChangeAspect="1"/>
           </p:cNvPicPr>
@@ -3206,7 +3206,7 @@
         <p:spPr>
           <a:xfrm>
             <a:off x="6675120" y="1463040"/>
-            <a:ext cx="5120640" cy="2880360"/>
+            <a:ext cx="5120640" cy="3200400"/>
           </a:xfrm>
           <a:prstGeom prst="rect">
             <a:avLst/>
@@ -4847,7 +4847,7 @@
       </p:sp>
       <p:pic>
         <p:nvPicPr>
-          <p:cNvPr id="27" name="Picture 26" descr="ctx_ai2.png"/>
+          <p:cNvPr id="27" name="Picture 26" descr="screenshot_ai_ml.png"/>
           <p:cNvPicPr>
             <a:picLocks noChangeAspect="1"/>
           </p:cNvPicPr>
@@ -4862,7 +4862,7 @@
         <p:spPr>
           <a:xfrm>
             <a:off x="6492240" y="1554480"/>
-            <a:ext cx="5212080" cy="2931795"/>
+            <a:ext cx="5212080" cy="3257550"/>
           </a:xfrm>
           <a:prstGeom prst="rect">
             <a:avLst/>
@@ -4899,7 +4899,7 @@
                 </a:solidFill>
                 <a:latin typeface="Malgun Gothic"/>
               </a:rPr>
-              <a:t>clevertap.com/ai — CleverAI Decisioning Engine</a:t>
+              <a:t>clevertap.com/ai — CleverAI™ Decisioning Engine</a:t>
             </a:r>
           </a:p>
         </p:txBody>
@@ -6086,7 +6086,7 @@
       </p:sp>
       <p:pic>
         <p:nvPicPr>
-          <p:cNvPr id="32" name="Picture 31" descr="ctx_ab.png"/>
+          <p:cNvPr id="32" name="Picture 31" descr="screenshot_product_s1_y3600.png"/>
           <p:cNvPicPr>
             <a:picLocks noChangeAspect="1"/>
           </p:cNvPicPr>
@@ -6138,7 +6138,7 @@
                 </a:solidFill>
                 <a:latin typeface="Malgun Gothic"/>
               </a:rPr>
-              <a:t>clevertap.com/ab-testing — A/B 실험 설정</a:t>
+              <a:t>CleverTap Experimentation &amp; Optimization — Variant A·B 트래픽 분할</a:t>
             </a:r>
           </a:p>
         </p:txBody>
@@ -7298,7 +7298,7 @@
       </p:sp>
       <p:pic>
         <p:nvPicPr>
-          <p:cNvPr id="31" name="Picture 30" descr="ctx_analytics2.png"/>
+          <p:cNvPr id="31" name="Picture 30" descr="screenshot_pricing_page_y1000.png"/>
           <p:cNvPicPr>
             <a:picLocks noChangeAspect="1"/>
           </p:cNvPicPr>
@@ -7350,7 +7350,7 @@
                 </a:solidFill>
                 <a:latin typeface="Malgun Gothic"/>
               </a:rPr>
-              <a:t>clevertap.com/solutions/fintech — 핀테크 활용 사례</a:t>
+              <a:t>Kotak·Blinkit·AJIO·Axis Bank 등 금융/커머스 글로벌 브랜드</a:t>
             </a:r>
           </a:p>
         </p:txBody>
@@ -14543,7 +14543,7 @@
       </p:sp>
       <p:pic>
         <p:nvPicPr>
-          <p:cNvPr id="32" name="Picture 31" descr="ctx_intro.png"/>
+          <p:cNvPr id="32" name="Picture 31" descr="screenshot_product_s1_y1800.png"/>
           <p:cNvPicPr>
             <a:picLocks noChangeAspect="1"/>
           </p:cNvPicPr>
@@ -14595,7 +14595,7 @@
                 </a:solidFill>
                 <a:latin typeface="Malgun Gothic"/>
               </a:rPr>
-              <a:t>clevertap.com/product — 올인원 플랫폼 개요</a:t>
+              <a:t>CleverTap 4대 핵심 플랫폼 — 분석·실험·개인화·오케스트레이션</a:t>
             </a:r>
           </a:p>
         </p:txBody>
@@ -16223,7 +16223,7 @@
       </p:sp>
       <p:pic>
         <p:nvPicPr>
-          <p:cNvPr id="43" name="Picture 42" descr="ctx_customers.png"/>
+          <p:cNvPr id="43" name="Picture 42" descr="screenshot_customers_page_y300.png"/>
           <p:cNvPicPr>
             <a:picLocks noChangeAspect="1"/>
           </p:cNvPicPr>
@@ -16275,7 +16275,7 @@
                 </a:solidFill>
                 <a:latin typeface="Malgun Gothic"/>
               </a:rPr>
-              <a:t>clevertap.com/customers — 글로벌 고객사 현황</a:t>
+              <a:t>전 세계 고객사 분포 — Dream11·Kotak·7-Eleven·Levi's 등</a:t>
             </a:r>
           </a:p>
         </p:txBody>
@@ -18418,7 +18418,7 @@
       </p:sp>
       <p:pic>
         <p:nvPicPr>
-          <p:cNvPr id="27" name="Picture 26" descr="ctx_architecture.png"/>
+          <p:cNvPr id="27" name="Picture 26" descr="screenshot_product_s1_y1300.png"/>
           <p:cNvPicPr>
             <a:picLocks noChangeAspect="1"/>
           </p:cNvPicPr>
@@ -18470,7 +18470,7 @@
                 </a:solidFill>
                 <a:latin typeface="Malgun Gothic"/>
               </a:rPr>
-              <a:t>clevertap.com/product — 플랫폼 아키텍처 다이어그램</a:t>
+              <a:t>Customer Data &amp; Analytics · Experimentation · Personalization · Orchestration</a:t>
             </a:r>
           </a:p>
         </p:txBody>
@@ -19474,7 +19474,7 @@
       </p:sp>
       <p:pic>
         <p:nvPicPr>
-          <p:cNvPr id="27" name="Picture 26" descr="ctx_analytics2.png"/>
+          <p:cNvPr id="27" name="Picture 26" descr="screenshot_product_s1_y3000.png"/>
           <p:cNvPicPr>
             <a:picLocks noChangeAspect="1"/>
           </p:cNvPicPr>
@@ -19526,7 +19526,7 @@
                 </a:solidFill>
                 <a:latin typeface="Malgun Gothic"/>
               </a:rPr>
-              <a:t>clevertap.com/customer-data-and-analytics — 분석 대시보드</a:t>
+              <a:t>CleverTap Customer Data &amp; Analytics — 고객 프로필 기반 실시간 분석</a:t>
             </a:r>
           </a:p>
         </p:txBody>
@@ -20378,7 +20378,7 @@
       </p:sp>
       <p:pic>
         <p:nvPicPr>
-          <p:cNvPr id="23" name="Picture 22" descr="ctx_segmentation2.png"/>
+          <p:cNvPr id="23" name="Picture 22" descr="screenshot_product_s1_y2400.png"/>
           <p:cNvPicPr>
             <a:picLocks noChangeAspect="1"/>
           </p:cNvPicPr>
@@ -20430,7 +20430,7 @@
                 </a:solidFill>
                 <a:latin typeface="Malgun Gothic"/>
               </a:rPr>
-              <a:t>clevertap.com/segmentation — 세그멘테이션 빌더</a:t>
+              <a:t>CleverTap 세그멘테이션 · 개인화 · 오케스트레이션 통합 플랫폼</a:t>
             </a:r>
           </a:p>
         </p:txBody>
@@ -21590,7 +21590,7 @@
       </p:sp>
       <p:pic>
         <p:nvPicPr>
-          <p:cNvPr id="31" name="Picture 30" descr="ctx_engagement2.png"/>
+          <p:cNvPr id="31" name="Picture 30" descr="screenshot_engagement.png"/>
           <p:cNvPicPr>
             <a:picLocks noChangeAspect="1"/>
           </p:cNvPicPr>
@@ -21605,7 +21605,7 @@
         <p:spPr>
           <a:xfrm>
             <a:off x="6492240" y="1554480"/>
-            <a:ext cx="5212080" cy="2931795"/>
+            <a:ext cx="5212080" cy="3257550"/>
           </a:xfrm>
           <a:prstGeom prst="rect">
             <a:avLst/>
@@ -21642,7 +21642,7 @@
                 </a:solidFill>
                 <a:latin typeface="Malgun Gothic"/>
               </a:rPr>
-              <a:t>clevertap.com/omnichannel-engagement — 캠페인 실행 화면</a:t>
+              <a:t>clevertap.com/omnichannel-engagement — 멀티채널 캠페인 실행</a:t>
             </a:r>
           </a:p>
         </p:txBody>

--- a/output/clevertap_proposal_kr_v5.pptx
+++ b/output/clevertap_proposal_kr_v5.pptx
@@ -3243,7 +3243,7 @@
                 </a:solidFill>
                 <a:latin typeface="Malgun Gothic"/>
               </a:rPr>
-              <a:t>clevertap.com 홈페이지</a:t>
+              <a:t>clevertap.com — 글로벌 모바일 마케팅 플랫폼</a:t>
             </a:r>
           </a:p>
         </p:txBody>
@@ -4847,7 +4847,7 @@
       </p:sp>
       <p:pic>
         <p:nvPicPr>
-          <p:cNvPr id="27" name="Picture 26" descr="screenshot_ai_ml.png"/>
+          <p:cNvPr id="27" name="Picture 26" descr="ctx_ai.png"/>
           <p:cNvPicPr>
             <a:picLocks noChangeAspect="1"/>
           </p:cNvPicPr>
@@ -4862,7 +4862,7 @@
         <p:spPr>
           <a:xfrm>
             <a:off x="6492240" y="1554480"/>
-            <a:ext cx="5212080" cy="3257550"/>
+            <a:ext cx="5212080" cy="2931795"/>
           </a:xfrm>
           <a:prstGeom prst="rect">
             <a:avLst/>
@@ -4899,7 +4899,7 @@
                 </a:solidFill>
                 <a:latin typeface="Malgun Gothic"/>
               </a:rPr>
-              <a:t>clevertap.com/ai — CleverAI™ Decisioning Engine</a:t>
+              <a:t>CleverAI™ — 예측 세그먼트 · STO · 동적 개인화 엔진</a:t>
             </a:r>
           </a:p>
         </p:txBody>
@@ -6086,7 +6086,7 @@
       </p:sp>
       <p:pic>
         <p:nvPicPr>
-          <p:cNvPr id="32" name="Picture 31" descr="screenshot_product_s1_y3600.png"/>
+          <p:cNvPr id="32" name="Picture 31" descr="ctx_ab.png"/>
           <p:cNvPicPr>
             <a:picLocks noChangeAspect="1"/>
           </p:cNvPicPr>
@@ -6101,7 +6101,7 @@
         <p:spPr>
           <a:xfrm>
             <a:off x="6492240" y="1554480"/>
-            <a:ext cx="5212080" cy="2931795"/>
+            <a:ext cx="5212080" cy="2906814"/>
           </a:xfrm>
           <a:prstGeom prst="rect">
             <a:avLst/>
@@ -6138,7 +6138,7 @@
                 </a:solidFill>
                 <a:latin typeface="Malgun Gothic"/>
               </a:rPr>
-              <a:t>CleverTap Experimentation &amp; Optimization — Variant A·B 트래픽 분할</a:t>
+              <a:t>Experiment Dashboard — 실험 CTR 비교 · 통계 유의성 자동 검증</a:t>
             </a:r>
           </a:p>
         </p:txBody>
@@ -7298,7 +7298,7 @@
       </p:sp>
       <p:pic>
         <p:nvPicPr>
-          <p:cNvPr id="31" name="Picture 30" descr="screenshot_pricing_page_y1000.png"/>
+          <p:cNvPr id="31" name="Picture 30" descr="ctx_fintech.png"/>
           <p:cNvPicPr>
             <a:picLocks noChangeAspect="1"/>
           </p:cNvPicPr>
@@ -7350,7 +7350,7 @@
                 </a:solidFill>
                 <a:latin typeface="Malgun Gothic"/>
               </a:rPr>
-              <a:t>Kotak·Blinkit·AJIO·Axis Bank 등 금융/커머스 글로벌 브랜드</a:t>
+              <a:t>FinTech Journey — 온보딩 전환 퍼널 · 라이프사이클 캠페인 성과</a:t>
             </a:r>
           </a:p>
         </p:txBody>
@@ -10160,20 +10160,160 @@
       </p:sp>
       <p:sp>
         <p:nvSpPr>
-          <p:cNvPr id="10" name="Rectangle 9"/>
+          <p:cNvPr id="10" name="TextBox 9"/>
+          <p:cNvSpPr txBox="1"/>
+          <p:nvPr/>
+        </p:nvSpPr>
+        <p:spPr>
+          <a:xfrm>
+            <a:off x="731520" y="3154680"/>
+            <a:ext cx="3108960" cy="420624"/>
+          </a:xfrm>
+          <a:prstGeom prst="rect">
+            <a:avLst/>
+          </a:prstGeom>
+          <a:noFill/>
+        </p:spPr>
+        <p:txBody>
+          <a:bodyPr wrap="square">
+            <a:spAutoFit/>
+          </a:bodyPr>
+          <a:lstStyle/>
+          <a:p>
+            <a:pPr algn="l"/>
+            <a:r>
+              <a:rPr sz="1200" b="0" i="0">
+                <a:solidFill>
+                  <a:srgbClr val="F4F4F8"/>
+                </a:solidFill>
+                <a:latin typeface="Malgun Gothic"/>
+              </a:rPr>
+              <a:t>v  핵심 분석 기능</a:t>
+            </a:r>
+          </a:p>
+        </p:txBody>
+      </p:sp>
+      <p:sp>
+        <p:nvSpPr>
+          <p:cNvPr id="11" name="TextBox 10"/>
+          <p:cNvSpPr txBox="1"/>
+          <p:nvPr/>
+        </p:nvSpPr>
+        <p:spPr>
+          <a:xfrm>
+            <a:off x="731520" y="3630168"/>
+            <a:ext cx="3108960" cy="420624"/>
+          </a:xfrm>
+          <a:prstGeom prst="rect">
+            <a:avLst/>
+          </a:prstGeom>
+          <a:noFill/>
+        </p:spPr>
+        <p:txBody>
+          <a:bodyPr wrap="square">
+            <a:spAutoFit/>
+          </a:bodyPr>
+          <a:lstStyle/>
+          <a:p>
+            <a:pPr algn="l"/>
+            <a:r>
+              <a:rPr sz="1200" b="0" i="0">
+                <a:solidFill>
+                  <a:srgbClr val="F4F4F8"/>
+                </a:solidFill>
+                <a:latin typeface="Malgun Gothic"/>
+              </a:rPr>
+              <a:t>v  푸시 + 이메일</a:t>
+            </a:r>
+          </a:p>
+        </p:txBody>
+      </p:sp>
+      <p:sp>
+        <p:nvSpPr>
+          <p:cNvPr id="12" name="TextBox 11"/>
+          <p:cNvSpPr txBox="1"/>
+          <p:nvPr/>
+        </p:nvSpPr>
+        <p:spPr>
+          <a:xfrm>
+            <a:off x="731520" y="4105656"/>
+            <a:ext cx="3108960" cy="420624"/>
+          </a:xfrm>
+          <a:prstGeom prst="rect">
+            <a:avLst/>
+          </a:prstGeom>
+          <a:noFill/>
+        </p:spPr>
+        <p:txBody>
+          <a:bodyPr wrap="square">
+            <a:spAutoFit/>
+          </a:bodyPr>
+          <a:lstStyle/>
+          <a:p>
+            <a:pPr algn="l"/>
+            <a:r>
+              <a:rPr sz="1200" b="0" i="0">
+                <a:solidFill>
+                  <a:srgbClr val="F4F4F8"/>
+                </a:solidFill>
+                <a:latin typeface="Malgun Gothic"/>
+              </a:rPr>
+              <a:t>v  기본 세그멘테이션</a:t>
+            </a:r>
+          </a:p>
+        </p:txBody>
+      </p:sp>
+      <p:sp>
+        <p:nvSpPr>
+          <p:cNvPr id="13" name="TextBox 12"/>
+          <p:cNvSpPr txBox="1"/>
+          <p:nvPr/>
+        </p:nvSpPr>
+        <p:spPr>
+          <a:xfrm>
+            <a:off x="731520" y="4581144"/>
+            <a:ext cx="3108960" cy="420624"/>
+          </a:xfrm>
+          <a:prstGeom prst="rect">
+            <a:avLst/>
+          </a:prstGeom>
+          <a:noFill/>
+        </p:spPr>
+        <p:txBody>
+          <a:bodyPr wrap="square">
+            <a:spAutoFit/>
+          </a:bodyPr>
+          <a:lstStyle/>
+          <a:p>
+            <a:pPr algn="l"/>
+            <a:r>
+              <a:rPr sz="1200" b="0" i="0">
+                <a:solidFill>
+                  <a:srgbClr val="F4F4F8"/>
+                </a:solidFill>
+                <a:latin typeface="Malgun Gothic"/>
+              </a:rPr>
+              <a:t>v  이메일 지원</a:t>
+            </a:r>
+          </a:p>
+        </p:txBody>
+      </p:sp>
+      <p:sp>
+        <p:nvSpPr>
+          <p:cNvPr id="14" name="Rectangle 13"/>
           <p:cNvSpPr/>
           <p:nvPr/>
         </p:nvSpPr>
         <p:spPr>
           <a:xfrm>
-            <a:off x="640080" y="3090672"/>
-            <a:ext cx="3291840" cy="27432"/>
-          </a:xfrm>
-          <a:prstGeom prst="rect">
-            <a:avLst/>
-          </a:prstGeom>
-          <a:solidFill>
-            <a:srgbClr val="9B8AFF"/>
+            <a:off x="4343400" y="1737360"/>
+            <a:ext cx="3474720" cy="4480560"/>
+          </a:xfrm>
+          <a:prstGeom prst="rect">
+            <a:avLst/>
+          </a:prstGeom>
+          <a:solidFill>
+            <a:srgbClr val="6B4EFF"/>
           </a:solidFill>
           <a:ln>
             <a:noFill/>
@@ -10203,146 +10343,6 @@
       </p:sp>
       <p:sp>
         <p:nvSpPr>
-          <p:cNvPr id="11" name="TextBox 10"/>
-          <p:cNvSpPr txBox="1"/>
-          <p:nvPr/>
-        </p:nvSpPr>
-        <p:spPr>
-          <a:xfrm>
-            <a:off x="731520" y="3218688"/>
-            <a:ext cx="3108960" cy="411480"/>
-          </a:xfrm>
-          <a:prstGeom prst="rect">
-            <a:avLst/>
-          </a:prstGeom>
-          <a:noFill/>
-        </p:spPr>
-        <p:txBody>
-          <a:bodyPr wrap="square">
-            <a:spAutoFit/>
-          </a:bodyPr>
-          <a:lstStyle/>
-          <a:p>
-            <a:pPr algn="l"/>
-            <a:r>
-              <a:rPr sz="1200" b="0" i="0">
-                <a:solidFill>
-                  <a:srgbClr val="FFFFFF"/>
-                </a:solidFill>
-                <a:latin typeface="Malgun Gothic"/>
-              </a:rPr>
-              <a:t>  핵심 분석 기능</a:t>
-            </a:r>
-          </a:p>
-        </p:txBody>
-      </p:sp>
-      <p:sp>
-        <p:nvSpPr>
-          <p:cNvPr id="12" name="TextBox 11"/>
-          <p:cNvSpPr txBox="1"/>
-          <p:nvPr/>
-        </p:nvSpPr>
-        <p:spPr>
-          <a:xfrm>
-            <a:off x="731520" y="3721608"/>
-            <a:ext cx="3108960" cy="411480"/>
-          </a:xfrm>
-          <a:prstGeom prst="rect">
-            <a:avLst/>
-          </a:prstGeom>
-          <a:noFill/>
-        </p:spPr>
-        <p:txBody>
-          <a:bodyPr wrap="square">
-            <a:spAutoFit/>
-          </a:bodyPr>
-          <a:lstStyle/>
-          <a:p>
-            <a:pPr algn="l"/>
-            <a:r>
-              <a:rPr sz="1200" b="0" i="0">
-                <a:solidFill>
-                  <a:srgbClr val="FFFFFF"/>
-                </a:solidFill>
-                <a:latin typeface="Malgun Gothic"/>
-              </a:rPr>
-              <a:t>  푸시 + 이메일</a:t>
-            </a:r>
-          </a:p>
-        </p:txBody>
-      </p:sp>
-      <p:sp>
-        <p:nvSpPr>
-          <p:cNvPr id="13" name="TextBox 12"/>
-          <p:cNvSpPr txBox="1"/>
-          <p:nvPr/>
-        </p:nvSpPr>
-        <p:spPr>
-          <a:xfrm>
-            <a:off x="731520" y="4224528"/>
-            <a:ext cx="3108960" cy="411480"/>
-          </a:xfrm>
-          <a:prstGeom prst="rect">
-            <a:avLst/>
-          </a:prstGeom>
-          <a:noFill/>
-        </p:spPr>
-        <p:txBody>
-          <a:bodyPr wrap="square">
-            <a:spAutoFit/>
-          </a:bodyPr>
-          <a:lstStyle/>
-          <a:p>
-            <a:pPr algn="l"/>
-            <a:r>
-              <a:rPr sz="1200" b="0" i="0">
-                <a:solidFill>
-                  <a:srgbClr val="FFFFFF"/>
-                </a:solidFill>
-                <a:latin typeface="Malgun Gothic"/>
-              </a:rPr>
-              <a:t>  기본 세그멘테이션</a:t>
-            </a:r>
-          </a:p>
-        </p:txBody>
-      </p:sp>
-      <p:sp>
-        <p:nvSpPr>
-          <p:cNvPr id="14" name="TextBox 13"/>
-          <p:cNvSpPr txBox="1"/>
-          <p:nvPr/>
-        </p:nvSpPr>
-        <p:spPr>
-          <a:xfrm>
-            <a:off x="731520" y="4727448"/>
-            <a:ext cx="3108960" cy="411480"/>
-          </a:xfrm>
-          <a:prstGeom prst="rect">
-            <a:avLst/>
-          </a:prstGeom>
-          <a:noFill/>
-        </p:spPr>
-        <p:txBody>
-          <a:bodyPr wrap="square">
-            <a:spAutoFit/>
-          </a:bodyPr>
-          <a:lstStyle/>
-          <a:p>
-            <a:pPr algn="l"/>
-            <a:r>
-              <a:rPr sz="1200" b="0" i="0">
-                <a:solidFill>
-                  <a:srgbClr val="FFFFFF"/>
-                </a:solidFill>
-                <a:latin typeface="Malgun Gothic"/>
-              </a:rPr>
-              <a:t>  이메일 지원</a:t>
-            </a:r>
-          </a:p>
-        </p:txBody>
-      </p:sp>
-      <p:sp>
-        <p:nvSpPr>
           <p:cNvPr id="15" name="Rectangle 14"/>
           <p:cNvSpPr/>
           <p:nvPr/>
@@ -10350,13 +10350,13 @@
         <p:spPr>
           <a:xfrm>
             <a:off x="4343400" y="1737360"/>
-            <a:ext cx="3474720" cy="4480560"/>
-          </a:xfrm>
-          <a:prstGeom prst="rect">
-            <a:avLst/>
-          </a:prstGeom>
-          <a:solidFill>
-            <a:srgbClr val="6B4EFF"/>
+            <a:ext cx="3474720" cy="329184"/>
+          </a:xfrm>
+          <a:prstGeom prst="rect">
+            <a:avLst/>
+          </a:prstGeom>
+          <a:solidFill>
+            <a:srgbClr val="3D1FCC"/>
           </a:solidFill>
           <a:ln>
             <a:noFill/>
@@ -10386,20 +10386,265 @@
       </p:sp>
       <p:sp>
         <p:nvSpPr>
-          <p:cNvPr id="16" name="Rectangle 15"/>
+          <p:cNvPr id="16" name="TextBox 15"/>
+          <p:cNvSpPr txBox="1"/>
+          <p:nvPr/>
+        </p:nvSpPr>
+        <p:spPr>
+          <a:xfrm>
+            <a:off x="4434840" y="1755648"/>
+            <a:ext cx="3291840" cy="274320"/>
+          </a:xfrm>
+          <a:prstGeom prst="rect">
+            <a:avLst/>
+          </a:prstGeom>
+          <a:noFill/>
+        </p:spPr>
+        <p:txBody>
+          <a:bodyPr wrap="square">
+            <a:spAutoFit/>
+          </a:bodyPr>
+          <a:lstStyle/>
+          <a:p>
+            <a:pPr algn="ctr"/>
+            <a:r>
+              <a:rPr sz="1100" b="1" i="0">
+                <a:solidFill>
+                  <a:srgbClr val="FFFFFF"/>
+                </a:solidFill>
+                <a:latin typeface="Malgun Gothic"/>
+              </a:rPr>
+              <a:t>추천</a:t>
+            </a:r>
+          </a:p>
+        </p:txBody>
+      </p:sp>
+      <p:sp>
+        <p:nvSpPr>
+          <p:cNvPr id="17" name="TextBox 16"/>
+          <p:cNvSpPr txBox="1"/>
+          <p:nvPr/>
+        </p:nvSpPr>
+        <p:spPr>
+          <a:xfrm>
+            <a:off x="4526280" y="2148840"/>
+            <a:ext cx="3108960" cy="457200"/>
+          </a:xfrm>
+          <a:prstGeom prst="rect">
+            <a:avLst/>
+          </a:prstGeom>
+          <a:noFill/>
+        </p:spPr>
+        <p:txBody>
+          <a:bodyPr wrap="square">
+            <a:spAutoFit/>
+          </a:bodyPr>
+          <a:lstStyle/>
+          <a:p>
+            <a:pPr algn="l"/>
+            <a:r>
+              <a:rPr sz="2200" b="1" i="0">
+                <a:solidFill>
+                  <a:srgbClr val="FFFFFF"/>
+                </a:solidFill>
+                <a:latin typeface="Malgun Gothic"/>
+              </a:rPr>
+              <a:t>Advanced</a:t>
+            </a:r>
+          </a:p>
+        </p:txBody>
+      </p:sp>
+      <p:sp>
+        <p:nvSpPr>
+          <p:cNvPr id="18" name="TextBox 17"/>
+          <p:cNvSpPr txBox="1"/>
+          <p:nvPr/>
+        </p:nvSpPr>
+        <p:spPr>
+          <a:xfrm>
+            <a:off x="4526280" y="2633472"/>
+            <a:ext cx="3108960" cy="384048"/>
+          </a:xfrm>
+          <a:prstGeom prst="rect">
+            <a:avLst/>
+          </a:prstGeom>
+          <a:noFill/>
+        </p:spPr>
+        <p:txBody>
+          <a:bodyPr wrap="square">
+            <a:spAutoFit/>
+          </a:bodyPr>
+          <a:lstStyle/>
+          <a:p>
+            <a:pPr algn="l"/>
+            <a:r>
+              <a:rPr sz="1100" b="0" i="0">
+                <a:solidFill>
+                  <a:srgbClr val="F4F4F8"/>
+                </a:solidFill>
+                <a:latin typeface="Malgun Gothic"/>
+              </a:rPr>
+              <a:t>Mid-Market·MAU 500만</a:t>
+            </a:r>
+          </a:p>
+        </p:txBody>
+      </p:sp>
+      <p:sp>
+        <p:nvSpPr>
+          <p:cNvPr id="19" name="TextBox 18"/>
+          <p:cNvSpPr txBox="1"/>
+          <p:nvPr/>
+        </p:nvSpPr>
+        <p:spPr>
+          <a:xfrm>
+            <a:off x="4526280" y="3154680"/>
+            <a:ext cx="3108960" cy="420624"/>
+          </a:xfrm>
+          <a:prstGeom prst="rect">
+            <a:avLst/>
+          </a:prstGeom>
+          <a:noFill/>
+        </p:spPr>
+        <p:txBody>
+          <a:bodyPr wrap="square">
+            <a:spAutoFit/>
+          </a:bodyPr>
+          <a:lstStyle/>
+          <a:p>
+            <a:pPr algn="l"/>
+            <a:r>
+              <a:rPr sz="1200" b="0" i="0">
+                <a:solidFill>
+                  <a:srgbClr val="FFFFFF"/>
+                </a:solidFill>
+                <a:latin typeface="Malgun Gothic"/>
+              </a:rPr>
+              <a:t>v  Essentials 전체</a:t>
+            </a:r>
+          </a:p>
+        </p:txBody>
+      </p:sp>
+      <p:sp>
+        <p:nvSpPr>
+          <p:cNvPr id="20" name="TextBox 19"/>
+          <p:cNvSpPr txBox="1"/>
+          <p:nvPr/>
+        </p:nvSpPr>
+        <p:spPr>
+          <a:xfrm>
+            <a:off x="4526280" y="3630168"/>
+            <a:ext cx="3108960" cy="420624"/>
+          </a:xfrm>
+          <a:prstGeom prst="rect">
+            <a:avLst/>
+          </a:prstGeom>
+          <a:noFill/>
+        </p:spPr>
+        <p:txBody>
+          <a:bodyPr wrap="square">
+            <a:spAutoFit/>
+          </a:bodyPr>
+          <a:lstStyle/>
+          <a:p>
+            <a:pPr algn="l"/>
+            <a:r>
+              <a:rPr sz="1200" b="0" i="0">
+                <a:solidFill>
+                  <a:srgbClr val="FFFFFF"/>
+                </a:solidFill>
+                <a:latin typeface="Malgun Gothic"/>
+              </a:rPr>
+              <a:t>v  AI 예측 세그먼트</a:t>
+            </a:r>
+          </a:p>
+        </p:txBody>
+      </p:sp>
+      <p:sp>
+        <p:nvSpPr>
+          <p:cNvPr id="21" name="TextBox 20"/>
+          <p:cNvSpPr txBox="1"/>
+          <p:nvPr/>
+        </p:nvSpPr>
+        <p:spPr>
+          <a:xfrm>
+            <a:off x="4526280" y="4105656"/>
+            <a:ext cx="3108960" cy="420624"/>
+          </a:xfrm>
+          <a:prstGeom prst="rect">
+            <a:avLst/>
+          </a:prstGeom>
+          <a:noFill/>
+        </p:spPr>
+        <p:txBody>
+          <a:bodyPr wrap="square">
+            <a:spAutoFit/>
+          </a:bodyPr>
+          <a:lstStyle/>
+          <a:p>
+            <a:pPr algn="l"/>
+            <a:r>
+              <a:rPr sz="1200" b="0" i="0">
+                <a:solidFill>
+                  <a:srgbClr val="FFFFFF"/>
+                </a:solidFill>
+                <a:latin typeface="Malgun Gothic"/>
+              </a:rPr>
+              <a:t>v  멀티채널 전체</a:t>
+            </a:r>
+          </a:p>
+        </p:txBody>
+      </p:sp>
+      <p:sp>
+        <p:nvSpPr>
+          <p:cNvPr id="22" name="TextBox 21"/>
+          <p:cNvSpPr txBox="1"/>
+          <p:nvPr/>
+        </p:nvSpPr>
+        <p:spPr>
+          <a:xfrm>
+            <a:off x="4526280" y="4581144"/>
+            <a:ext cx="3108960" cy="420624"/>
+          </a:xfrm>
+          <a:prstGeom prst="rect">
+            <a:avLst/>
+          </a:prstGeom>
+          <a:noFill/>
+        </p:spPr>
+        <p:txBody>
+          <a:bodyPr wrap="square">
+            <a:spAutoFit/>
+          </a:bodyPr>
+          <a:lstStyle/>
+          <a:p>
+            <a:pPr algn="l"/>
+            <a:r>
+              <a:rPr sz="1200" b="0" i="0">
+                <a:solidFill>
+                  <a:srgbClr val="FFFFFF"/>
+                </a:solidFill>
+                <a:latin typeface="Malgun Gothic"/>
+              </a:rPr>
+              <a:t>v  전담 CSM</a:t>
+            </a:r>
+          </a:p>
+        </p:txBody>
+      </p:sp>
+      <p:sp>
+        <p:nvSpPr>
+          <p:cNvPr id="23" name="Rectangle 22"/>
           <p:cNvSpPr/>
           <p:nvPr/>
         </p:nvSpPr>
         <p:spPr>
           <a:xfrm>
-            <a:off x="4343400" y="1737360"/>
-            <a:ext cx="3474720" cy="329184"/>
-          </a:xfrm>
-          <a:prstGeom prst="rect">
-            <a:avLst/>
-          </a:prstGeom>
-          <a:solidFill>
-            <a:srgbClr val="3D1FCC"/>
+            <a:off x="8138160" y="1737360"/>
+            <a:ext cx="3474720" cy="4480560"/>
+          </a:xfrm>
+          <a:prstGeom prst="rect">
+            <a:avLst/>
+          </a:prstGeom>
+          <a:solidFill>
+            <a:srgbClr val="2D2D4E"/>
           </a:solidFill>
           <a:ln>
             <a:noFill/>
@@ -10429,49 +10674,49 @@
       </p:sp>
       <p:sp>
         <p:nvSpPr>
-          <p:cNvPr id="17" name="TextBox 16"/>
-          <p:cNvSpPr txBox="1"/>
-          <p:nvPr/>
-        </p:nvSpPr>
-        <p:spPr>
-          <a:xfrm>
-            <a:off x="4434840" y="1755648"/>
-            <a:ext cx="3291840" cy="274320"/>
-          </a:xfrm>
-          <a:prstGeom prst="rect">
-            <a:avLst/>
-          </a:prstGeom>
-          <a:noFill/>
-        </p:spPr>
-        <p:txBody>
-          <a:bodyPr wrap="square">
-            <a:spAutoFit/>
-          </a:bodyPr>
-          <a:lstStyle/>
-          <a:p>
-            <a:pPr algn="ctr"/>
-            <a:r>
-              <a:rPr sz="1100" b="1" i="0">
+          <p:cNvPr id="24" name="TextBox 23"/>
+          <p:cNvSpPr txBox="1"/>
+          <p:nvPr/>
+        </p:nvSpPr>
+        <p:spPr>
+          <a:xfrm>
+            <a:off x="8321040" y="2148840"/>
+            <a:ext cx="3108960" cy="457200"/>
+          </a:xfrm>
+          <a:prstGeom prst="rect">
+            <a:avLst/>
+          </a:prstGeom>
+          <a:noFill/>
+        </p:spPr>
+        <p:txBody>
+          <a:bodyPr wrap="square">
+            <a:spAutoFit/>
+          </a:bodyPr>
+          <a:lstStyle/>
+          <a:p>
+            <a:pPr algn="l"/>
+            <a:r>
+              <a:rPr sz="2200" b="1" i="0">
                 <a:solidFill>
                   <a:srgbClr val="FFFFFF"/>
                 </a:solidFill>
                 <a:latin typeface="Malgun Gothic"/>
               </a:rPr>
-              <a:t>추천</a:t>
-            </a:r>
-          </a:p>
-        </p:txBody>
-      </p:sp>
-      <p:sp>
-        <p:nvSpPr>
-          <p:cNvPr id="18" name="TextBox 17"/>
-          <p:cNvSpPr txBox="1"/>
-          <p:nvPr/>
-        </p:nvSpPr>
-        <p:spPr>
-          <a:xfrm>
-            <a:off x="4526280" y="2148840"/>
-            <a:ext cx="3108960" cy="457200"/>
+              <a:t>Enterprise</a:t>
+            </a:r>
+          </a:p>
+        </p:txBody>
+      </p:sp>
+      <p:sp>
+        <p:nvSpPr>
+          <p:cNvPr id="25" name="TextBox 24"/>
+          <p:cNvSpPr txBox="1"/>
+          <p:nvPr/>
+        </p:nvSpPr>
+        <p:spPr>
+          <a:xfrm>
+            <a:off x="8321040" y="2633472"/>
+            <a:ext cx="3108960" cy="384048"/>
           </a:xfrm>
           <a:prstGeom prst="rect">
             <a:avLst/>
@@ -10486,27 +10731,27 @@
           <a:p>
             <a:pPr algn="l"/>
             <a:r>
-              <a:rPr sz="2200" b="1" i="0">
-                <a:solidFill>
-                  <a:srgbClr val="FFFFFF"/>
-                </a:solidFill>
-                <a:latin typeface="Malgun Gothic"/>
-              </a:rPr>
-              <a:t>Advanced</a:t>
-            </a:r>
-          </a:p>
-        </p:txBody>
-      </p:sp>
-      <p:sp>
-        <p:nvSpPr>
-          <p:cNvPr id="19" name="TextBox 18"/>
-          <p:cNvSpPr txBox="1"/>
-          <p:nvPr/>
-        </p:nvSpPr>
-        <p:spPr>
-          <a:xfrm>
-            <a:off x="4526280" y="2633472"/>
-            <a:ext cx="3108960" cy="384048"/>
+              <a:rPr sz="1100" b="0" i="0">
+                <a:solidFill>
+                  <a:srgbClr val="F4F4F8"/>
+                </a:solidFill>
+                <a:latin typeface="Malgun Gothic"/>
+              </a:rPr>
+              <a:t>대기업·MAU 무제한</a:t>
+            </a:r>
+          </a:p>
+        </p:txBody>
+      </p:sp>
+      <p:sp>
+        <p:nvSpPr>
+          <p:cNvPr id="26" name="TextBox 25"/>
+          <p:cNvSpPr txBox="1"/>
+          <p:nvPr/>
+        </p:nvSpPr>
+        <p:spPr>
+          <a:xfrm>
+            <a:off x="8321040" y="3154680"/>
+            <a:ext cx="3108960" cy="420624"/>
           </a:xfrm>
           <a:prstGeom prst="rect">
             <a:avLst/>
@@ -10521,33 +10766,138 @@
           <a:p>
             <a:pPr algn="l"/>
             <a:r>
-              <a:rPr sz="1100" b="0" i="0">
+              <a:rPr sz="1200" b="0" i="0">
                 <a:solidFill>
                   <a:srgbClr val="F4F4F8"/>
                 </a:solidFill>
                 <a:latin typeface="Malgun Gothic"/>
               </a:rPr>
-              <a:t>Mid-Market·MAU 500만</a:t>
-            </a:r>
-          </a:p>
-        </p:txBody>
-      </p:sp>
-      <p:sp>
-        <p:nvSpPr>
-          <p:cNvPr id="20" name="Rectangle 19"/>
+              <a:t>v  Advanced 전체</a:t>
+            </a:r>
+          </a:p>
+        </p:txBody>
+      </p:sp>
+      <p:sp>
+        <p:nvSpPr>
+          <p:cNvPr id="27" name="TextBox 26"/>
+          <p:cNvSpPr txBox="1"/>
+          <p:nvPr/>
+        </p:nvSpPr>
+        <p:spPr>
+          <a:xfrm>
+            <a:off x="8321040" y="3630168"/>
+            <a:ext cx="3108960" cy="420624"/>
+          </a:xfrm>
+          <a:prstGeom prst="rect">
+            <a:avLst/>
+          </a:prstGeom>
+          <a:noFill/>
+        </p:spPr>
+        <p:txBody>
+          <a:bodyPr wrap="square">
+            <a:spAutoFit/>
+          </a:bodyPr>
+          <a:lstStyle/>
+          <a:p>
+            <a:pPr algn="l"/>
+            <a:r>
+              <a:rPr sz="1200" b="0" i="0">
+                <a:solidFill>
+                  <a:srgbClr val="F4F4F8"/>
+                </a:solidFill>
+                <a:latin typeface="Malgun Gothic"/>
+              </a:rPr>
+              <a:t>v  커스텀 SLA</a:t>
+            </a:r>
+          </a:p>
+        </p:txBody>
+      </p:sp>
+      <p:sp>
+        <p:nvSpPr>
+          <p:cNvPr id="28" name="TextBox 27"/>
+          <p:cNvSpPr txBox="1"/>
+          <p:nvPr/>
+        </p:nvSpPr>
+        <p:spPr>
+          <a:xfrm>
+            <a:off x="8321040" y="4105656"/>
+            <a:ext cx="3108960" cy="420624"/>
+          </a:xfrm>
+          <a:prstGeom prst="rect">
+            <a:avLst/>
+          </a:prstGeom>
+          <a:noFill/>
+        </p:spPr>
+        <p:txBody>
+          <a:bodyPr wrap="square">
+            <a:spAutoFit/>
+          </a:bodyPr>
+          <a:lstStyle/>
+          <a:p>
+            <a:pPr algn="l"/>
+            <a:r>
+              <a:rPr sz="1200" b="0" i="0">
+                <a:solidFill>
+                  <a:srgbClr val="F4F4F8"/>
+                </a:solidFill>
+                <a:latin typeface="Malgun Gothic"/>
+              </a:rPr>
+              <a:t>v  온프레미스 옵션</a:t>
+            </a:r>
+          </a:p>
+        </p:txBody>
+      </p:sp>
+      <p:sp>
+        <p:nvSpPr>
+          <p:cNvPr id="29" name="TextBox 28"/>
+          <p:cNvSpPr txBox="1"/>
+          <p:nvPr/>
+        </p:nvSpPr>
+        <p:spPr>
+          <a:xfrm>
+            <a:off x="8321040" y="4581144"/>
+            <a:ext cx="3108960" cy="420624"/>
+          </a:xfrm>
+          <a:prstGeom prst="rect">
+            <a:avLst/>
+          </a:prstGeom>
+          <a:noFill/>
+        </p:spPr>
+        <p:txBody>
+          <a:bodyPr wrap="square">
+            <a:spAutoFit/>
+          </a:bodyPr>
+          <a:lstStyle/>
+          <a:p>
+            <a:pPr algn="l"/>
+            <a:r>
+              <a:rPr sz="1200" b="0" i="0">
+                <a:solidFill>
+                  <a:srgbClr val="F4F4F8"/>
+                </a:solidFill>
+                <a:latin typeface="Malgun Gothic"/>
+              </a:rPr>
+              <a:t>v  전용 인프라</a:t>
+            </a:r>
+          </a:p>
+        </p:txBody>
+      </p:sp>
+      <p:sp>
+        <p:nvSpPr>
+          <p:cNvPr id="30" name="Rectangle 29"/>
           <p:cNvSpPr/>
           <p:nvPr/>
         </p:nvSpPr>
         <p:spPr>
           <a:xfrm>
-            <a:off x="4434840" y="3090672"/>
-            <a:ext cx="3291840" cy="27432"/>
-          </a:xfrm>
-          <a:prstGeom prst="rect">
-            <a:avLst/>
-          </a:prstGeom>
-          <a:solidFill>
-            <a:srgbClr val="9B8AFF"/>
+            <a:off x="548640" y="6446520"/>
+            <a:ext cx="10972800" cy="320040"/>
+          </a:xfrm>
+          <a:prstGeom prst="rect">
+            <a:avLst/>
+          </a:prstGeom>
+          <a:solidFill>
+            <a:srgbClr val="2D2D4E"/>
           </a:solidFill>
           <a:ln>
             <a:noFill/>
@@ -10577,471 +10927,35 @@
       </p:sp>
       <p:sp>
         <p:nvSpPr>
-          <p:cNvPr id="21" name="TextBox 20"/>
-          <p:cNvSpPr txBox="1"/>
-          <p:nvPr/>
-        </p:nvSpPr>
-        <p:spPr>
-          <a:xfrm>
-            <a:off x="4526280" y="3218688"/>
-            <a:ext cx="3108960" cy="411480"/>
-          </a:xfrm>
-          <a:prstGeom prst="rect">
-            <a:avLst/>
-          </a:prstGeom>
-          <a:noFill/>
-        </p:spPr>
-        <p:txBody>
-          <a:bodyPr wrap="square">
-            <a:spAutoFit/>
-          </a:bodyPr>
-          <a:lstStyle/>
-          <a:p>
-            <a:pPr algn="l"/>
+          <p:cNvPr id="31" name="TextBox 30"/>
+          <p:cNvSpPr txBox="1"/>
+          <p:nvPr/>
+        </p:nvSpPr>
+        <p:spPr>
+          <a:xfrm>
+            <a:off x="731520" y="6492240"/>
+            <a:ext cx="10789920" cy="256032"/>
+          </a:xfrm>
+          <a:prstGeom prst="rect">
+            <a:avLst/>
+          </a:prstGeom>
+          <a:noFill/>
+        </p:spPr>
+        <p:txBody>
+          <a:bodyPr wrap="square">
+            <a:spAutoFit/>
+          </a:bodyPr>
+          <a:lstStyle/>
+          <a:p>
+            <a:pPr algn="ctr"/>
             <a:r>
               <a:rPr sz="1200" b="0" i="0">
                 <a:solidFill>
-                  <a:srgbClr val="FFFFFF"/>
-                </a:solidFill>
-                <a:latin typeface="Malgun Gothic"/>
-              </a:rPr>
-              <a:t>  Essentials 전체</a:t>
-            </a:r>
-          </a:p>
-        </p:txBody>
-      </p:sp>
-      <p:sp>
-        <p:nvSpPr>
-          <p:cNvPr id="22" name="TextBox 21"/>
-          <p:cNvSpPr txBox="1"/>
-          <p:nvPr/>
-        </p:nvSpPr>
-        <p:spPr>
-          <a:xfrm>
-            <a:off x="4526280" y="3721608"/>
-            <a:ext cx="3108960" cy="411480"/>
-          </a:xfrm>
-          <a:prstGeom prst="rect">
-            <a:avLst/>
-          </a:prstGeom>
-          <a:noFill/>
-        </p:spPr>
-        <p:txBody>
-          <a:bodyPr wrap="square">
-            <a:spAutoFit/>
-          </a:bodyPr>
-          <a:lstStyle/>
-          <a:p>
-            <a:pPr algn="l"/>
-            <a:r>
-              <a:rPr sz="1200" b="0" i="0">
-                <a:solidFill>
-                  <a:srgbClr val="FFFFFF"/>
-                </a:solidFill>
-                <a:latin typeface="Malgun Gothic"/>
-              </a:rPr>
-              <a:t>  AI 예측 세그먼트</a:t>
-            </a:r>
-          </a:p>
-        </p:txBody>
-      </p:sp>
-      <p:sp>
-        <p:nvSpPr>
-          <p:cNvPr id="23" name="TextBox 22"/>
-          <p:cNvSpPr txBox="1"/>
-          <p:nvPr/>
-        </p:nvSpPr>
-        <p:spPr>
-          <a:xfrm>
-            <a:off x="4526280" y="4224528"/>
-            <a:ext cx="3108960" cy="411480"/>
-          </a:xfrm>
-          <a:prstGeom prst="rect">
-            <a:avLst/>
-          </a:prstGeom>
-          <a:noFill/>
-        </p:spPr>
-        <p:txBody>
-          <a:bodyPr wrap="square">
-            <a:spAutoFit/>
-          </a:bodyPr>
-          <a:lstStyle/>
-          <a:p>
-            <a:pPr algn="l"/>
-            <a:r>
-              <a:rPr sz="1200" b="0" i="0">
-                <a:solidFill>
-                  <a:srgbClr val="FFFFFF"/>
-                </a:solidFill>
-                <a:latin typeface="Malgun Gothic"/>
-              </a:rPr>
-              <a:t>  멀티채널 전체</a:t>
-            </a:r>
-          </a:p>
-        </p:txBody>
-      </p:sp>
-      <p:sp>
-        <p:nvSpPr>
-          <p:cNvPr id="24" name="TextBox 23"/>
-          <p:cNvSpPr txBox="1"/>
-          <p:nvPr/>
-        </p:nvSpPr>
-        <p:spPr>
-          <a:xfrm>
-            <a:off x="4526280" y="4727448"/>
-            <a:ext cx="3108960" cy="411480"/>
-          </a:xfrm>
-          <a:prstGeom prst="rect">
-            <a:avLst/>
-          </a:prstGeom>
-          <a:noFill/>
-        </p:spPr>
-        <p:txBody>
-          <a:bodyPr wrap="square">
-            <a:spAutoFit/>
-          </a:bodyPr>
-          <a:lstStyle/>
-          <a:p>
-            <a:pPr algn="l"/>
-            <a:r>
-              <a:rPr sz="1200" b="0" i="0">
-                <a:solidFill>
-                  <a:srgbClr val="FFFFFF"/>
-                </a:solidFill>
-                <a:latin typeface="Malgun Gothic"/>
-              </a:rPr>
-              <a:t>  전담 CSM</a:t>
-            </a:r>
-          </a:p>
-        </p:txBody>
-      </p:sp>
-      <p:sp>
-        <p:nvSpPr>
-          <p:cNvPr id="25" name="Rectangle 24"/>
-          <p:cNvSpPr/>
-          <p:nvPr/>
-        </p:nvSpPr>
-        <p:spPr>
-          <a:xfrm>
-            <a:off x="8138160" y="1737360"/>
-            <a:ext cx="3474720" cy="4480560"/>
-          </a:xfrm>
-          <a:prstGeom prst="rect">
-            <a:avLst/>
-          </a:prstGeom>
-          <a:solidFill>
-            <a:srgbClr val="2D2D4E"/>
-          </a:solidFill>
-          <a:ln>
-            <a:noFill/>
-          </a:ln>
-        </p:spPr>
-        <p:style>
-          <a:lnRef idx="1">
-            <a:schemeClr val="accent1"/>
-          </a:lnRef>
-          <a:fillRef idx="3">
-            <a:schemeClr val="accent1"/>
-          </a:fillRef>
-          <a:effectRef idx="2">
-            <a:schemeClr val="accent1"/>
-          </a:effectRef>
-          <a:fontRef idx="minor">
-            <a:schemeClr val="lt1"/>
-          </a:fontRef>
-        </p:style>
-        <p:txBody>
-          <a:bodyPr rtlCol="0" anchor="ctr"/>
-          <a:lstStyle/>
-          <a:p>
-            <a:pPr algn="ctr"/>
-          </a:p>
-        </p:txBody>
-      </p:sp>
-      <p:sp>
-        <p:nvSpPr>
-          <p:cNvPr id="26" name="TextBox 25"/>
-          <p:cNvSpPr txBox="1"/>
-          <p:nvPr/>
-        </p:nvSpPr>
-        <p:spPr>
-          <a:xfrm>
-            <a:off x="8321040" y="2148840"/>
-            <a:ext cx="3108960" cy="457200"/>
-          </a:xfrm>
-          <a:prstGeom prst="rect">
-            <a:avLst/>
-          </a:prstGeom>
-          <a:noFill/>
-        </p:spPr>
-        <p:txBody>
-          <a:bodyPr wrap="square">
-            <a:spAutoFit/>
-          </a:bodyPr>
-          <a:lstStyle/>
-          <a:p>
-            <a:pPr algn="l"/>
-            <a:r>
-              <a:rPr sz="2200" b="1" i="0">
-                <a:solidFill>
-                  <a:srgbClr val="FFFFFF"/>
-                </a:solidFill>
-                <a:latin typeface="Malgun Gothic"/>
-              </a:rPr>
-              <a:t>Enterprise</a:t>
-            </a:r>
-          </a:p>
-        </p:txBody>
-      </p:sp>
-      <p:sp>
-        <p:nvSpPr>
-          <p:cNvPr id="27" name="TextBox 26"/>
-          <p:cNvSpPr txBox="1"/>
-          <p:nvPr/>
-        </p:nvSpPr>
-        <p:spPr>
-          <a:xfrm>
-            <a:off x="8321040" y="2633472"/>
-            <a:ext cx="3108960" cy="384048"/>
-          </a:xfrm>
-          <a:prstGeom prst="rect">
-            <a:avLst/>
-          </a:prstGeom>
-          <a:noFill/>
-        </p:spPr>
-        <p:txBody>
-          <a:bodyPr wrap="square">
-            <a:spAutoFit/>
-          </a:bodyPr>
-          <a:lstStyle/>
-          <a:p>
-            <a:pPr algn="l"/>
-            <a:r>
-              <a:rPr sz="1100" b="0" i="0">
-                <a:solidFill>
-                  <a:srgbClr val="F4F4F8"/>
-                </a:solidFill>
-                <a:latin typeface="Malgun Gothic"/>
-              </a:rPr>
-              <a:t>대기업·MAU 무제한</a:t>
-            </a:r>
-          </a:p>
-        </p:txBody>
-      </p:sp>
-      <p:sp>
-        <p:nvSpPr>
-          <p:cNvPr id="28" name="Rectangle 27"/>
-          <p:cNvSpPr/>
-          <p:nvPr/>
-        </p:nvSpPr>
-        <p:spPr>
-          <a:xfrm>
-            <a:off x="8229600" y="3090672"/>
-            <a:ext cx="3291840" cy="27432"/>
-          </a:xfrm>
-          <a:prstGeom prst="rect">
-            <a:avLst/>
-          </a:prstGeom>
-          <a:solidFill>
-            <a:srgbClr val="9B8AFF"/>
-          </a:solidFill>
-          <a:ln>
-            <a:noFill/>
-          </a:ln>
-        </p:spPr>
-        <p:style>
-          <a:lnRef idx="1">
-            <a:schemeClr val="accent1"/>
-          </a:lnRef>
-          <a:fillRef idx="3">
-            <a:schemeClr val="accent1"/>
-          </a:fillRef>
-          <a:effectRef idx="2">
-            <a:schemeClr val="accent1"/>
-          </a:effectRef>
-          <a:fontRef idx="minor">
-            <a:schemeClr val="lt1"/>
-          </a:fontRef>
-        </p:style>
-        <p:txBody>
-          <a:bodyPr rtlCol="0" anchor="ctr"/>
-          <a:lstStyle/>
-          <a:p>
-            <a:pPr algn="ctr"/>
-          </a:p>
-        </p:txBody>
-      </p:sp>
-      <p:sp>
-        <p:nvSpPr>
-          <p:cNvPr id="29" name="TextBox 28"/>
-          <p:cNvSpPr txBox="1"/>
-          <p:nvPr/>
-        </p:nvSpPr>
-        <p:spPr>
-          <a:xfrm>
-            <a:off x="8321040" y="3218688"/>
-            <a:ext cx="3108960" cy="411480"/>
-          </a:xfrm>
-          <a:prstGeom prst="rect">
-            <a:avLst/>
-          </a:prstGeom>
-          <a:noFill/>
-        </p:spPr>
-        <p:txBody>
-          <a:bodyPr wrap="square">
-            <a:spAutoFit/>
-          </a:bodyPr>
-          <a:lstStyle/>
-          <a:p>
-            <a:pPr algn="l"/>
-            <a:r>
-              <a:rPr sz="1200" b="0" i="0">
-                <a:solidFill>
-                  <a:srgbClr val="FFFFFF"/>
-                </a:solidFill>
-                <a:latin typeface="Malgun Gothic"/>
-              </a:rPr>
-              <a:t>  Advanced 전체</a:t>
-            </a:r>
-          </a:p>
-        </p:txBody>
-      </p:sp>
-      <p:sp>
-        <p:nvSpPr>
-          <p:cNvPr id="30" name="TextBox 29"/>
-          <p:cNvSpPr txBox="1"/>
-          <p:nvPr/>
-        </p:nvSpPr>
-        <p:spPr>
-          <a:xfrm>
-            <a:off x="8321040" y="3721608"/>
-            <a:ext cx="3108960" cy="411480"/>
-          </a:xfrm>
-          <a:prstGeom prst="rect">
-            <a:avLst/>
-          </a:prstGeom>
-          <a:noFill/>
-        </p:spPr>
-        <p:txBody>
-          <a:bodyPr wrap="square">
-            <a:spAutoFit/>
-          </a:bodyPr>
-          <a:lstStyle/>
-          <a:p>
-            <a:pPr algn="l"/>
-            <a:r>
-              <a:rPr sz="1200" b="0" i="0">
-                <a:solidFill>
-                  <a:srgbClr val="FFFFFF"/>
-                </a:solidFill>
-                <a:latin typeface="Malgun Gothic"/>
-              </a:rPr>
-              <a:t>  커스텀 SLA</a:t>
-            </a:r>
-          </a:p>
-        </p:txBody>
-      </p:sp>
-      <p:sp>
-        <p:nvSpPr>
-          <p:cNvPr id="31" name="TextBox 30"/>
-          <p:cNvSpPr txBox="1"/>
-          <p:nvPr/>
-        </p:nvSpPr>
-        <p:spPr>
-          <a:xfrm>
-            <a:off x="8321040" y="4224528"/>
-            <a:ext cx="3108960" cy="411480"/>
-          </a:xfrm>
-          <a:prstGeom prst="rect">
-            <a:avLst/>
-          </a:prstGeom>
-          <a:noFill/>
-        </p:spPr>
-        <p:txBody>
-          <a:bodyPr wrap="square">
-            <a:spAutoFit/>
-          </a:bodyPr>
-          <a:lstStyle/>
-          <a:p>
-            <a:pPr algn="l"/>
-            <a:r>
-              <a:rPr sz="1200" b="0" i="0">
-                <a:solidFill>
-                  <a:srgbClr val="FFFFFF"/>
-                </a:solidFill>
-                <a:latin typeface="Malgun Gothic"/>
-              </a:rPr>
-              <a:t>  온프레미스 옵션</a:t>
-            </a:r>
-          </a:p>
-        </p:txBody>
-      </p:sp>
-      <p:sp>
-        <p:nvSpPr>
-          <p:cNvPr id="32" name="TextBox 31"/>
-          <p:cNvSpPr txBox="1"/>
-          <p:nvPr/>
-        </p:nvSpPr>
-        <p:spPr>
-          <a:xfrm>
-            <a:off x="8321040" y="4727448"/>
-            <a:ext cx="3108960" cy="411480"/>
-          </a:xfrm>
-          <a:prstGeom prst="rect">
-            <a:avLst/>
-          </a:prstGeom>
-          <a:noFill/>
-        </p:spPr>
-        <p:txBody>
-          <a:bodyPr wrap="square">
-            <a:spAutoFit/>
-          </a:bodyPr>
-          <a:lstStyle/>
-          <a:p>
-            <a:pPr algn="l"/>
-            <a:r>
-              <a:rPr sz="1200" b="0" i="0">
-                <a:solidFill>
-                  <a:srgbClr val="FFFFFF"/>
-                </a:solidFill>
-                <a:latin typeface="Malgun Gothic"/>
-              </a:rPr>
-              <a:t>  전용 인프라</a:t>
-            </a:r>
-          </a:p>
-        </p:txBody>
-      </p:sp>
-      <p:sp>
-        <p:nvSpPr>
-          <p:cNvPr id="33" name="TextBox 32"/>
-          <p:cNvSpPr txBox="1"/>
-          <p:nvPr/>
-        </p:nvSpPr>
-        <p:spPr>
-          <a:xfrm>
-            <a:off x="548640" y="6492240"/>
-            <a:ext cx="10972800" cy="320040"/>
-          </a:xfrm>
-          <a:prstGeom prst="rect">
-            <a:avLst/>
-          </a:prstGeom>
-          <a:noFill/>
-        </p:spPr>
-        <p:txBody>
-          <a:bodyPr wrap="square">
-            <a:spAutoFit/>
-          </a:bodyPr>
-          <a:lstStyle/>
-          <a:p>
-            <a:pPr algn="l"/>
-            <a:r>
-              <a:rPr sz="1300" b="0" i="0">
-                <a:solidFill>
-                  <a:srgbClr val="FFFFFF"/>
-                </a:solidFill>
-                <a:latin typeface="Malgun Gothic"/>
-              </a:rPr>
-              <a:t>다음 단계:  1) POC 범위 확정  -&gt;  2) 2주 무료 파일럿  -&gt;  3) 맞춤 견적  -&gt;  4) 계약 및 온보딩</a:t>
+                  <a:srgbClr val="9B8AFF"/>
+                </a:solidFill>
+                <a:latin typeface="Malgun Gothic"/>
+              </a:rPr>
+              <a:t>모든 플랜: 무료 파일럿 2주 제공 · 연간 계약 할인 · 한국 전담 지원팀</a:t>
             </a:r>
           </a:p>
         </p:txBody>
@@ -11158,14 +11072,14 @@
         </p:nvSpPr>
         <p:spPr>
           <a:xfrm>
-            <a:off x="1371600" y="1371600"/>
-            <a:ext cx="9144000" cy="4389120"/>
-          </a:xfrm>
-          <a:prstGeom prst="rect">
-            <a:avLst/>
-          </a:prstGeom>
-          <a:solidFill>
-            <a:srgbClr val="2D2D4E"/>
+            <a:off x="0" y="0"/>
+            <a:ext cx="12188952" cy="1371600"/>
+          </a:xfrm>
+          <a:prstGeom prst="rect">
+            <a:avLst/>
+          </a:prstGeom>
+          <a:solidFill>
+            <a:srgbClr val="16213E"/>
           </a:solidFill>
           <a:ln>
             <a:noFill/>
@@ -11202,13 +11116,13 @@
         <p:spPr>
           <a:xfrm>
             <a:off x="1371600" y="1371600"/>
-            <a:ext cx="9144000" cy="64008"/>
-          </a:xfrm>
-          <a:prstGeom prst="rect">
-            <a:avLst/>
-          </a:prstGeom>
-          <a:solidFill>
-            <a:srgbClr val="6B4EFF"/>
+            <a:ext cx="9144000" cy="4389120"/>
+          </a:xfrm>
+          <a:prstGeom prst="rect">
+            <a:avLst/>
+          </a:prstGeom>
+          <a:solidFill>
+            <a:srgbClr val="2D2D4E"/>
           </a:solidFill>
           <a:ln>
             <a:noFill/>
@@ -11238,119 +11152,14 @@
       </p:sp>
       <p:sp>
         <p:nvSpPr>
-          <p:cNvPr id="6" name="TextBox 5"/>
-          <p:cNvSpPr txBox="1"/>
-          <p:nvPr/>
-        </p:nvSpPr>
-        <p:spPr>
-          <a:xfrm>
-            <a:off x="1828800" y="1828800"/>
-            <a:ext cx="8229600" cy="822960"/>
-          </a:xfrm>
-          <a:prstGeom prst="rect">
-            <a:avLst/>
-          </a:prstGeom>
-          <a:noFill/>
-        </p:spPr>
-        <p:txBody>
-          <a:bodyPr wrap="square">
-            <a:spAutoFit/>
-          </a:bodyPr>
-          <a:lstStyle/>
-          <a:p>
-            <a:pPr algn="ctr"/>
-            <a:r>
-              <a:rPr sz="4000" b="1" i="0">
-                <a:solidFill>
-                  <a:srgbClr val="FFFFFF"/>
-                </a:solidFill>
-                <a:latin typeface="Malgun Gothic"/>
-              </a:rPr>
-              <a:t>지금 바로 시작하세요</a:t>
-            </a:r>
-          </a:p>
-        </p:txBody>
-      </p:sp>
-      <p:sp>
-        <p:nvSpPr>
-          <p:cNvPr id="7" name="TextBox 6"/>
-          <p:cNvSpPr txBox="1"/>
-          <p:nvPr/>
-        </p:nvSpPr>
-        <p:spPr>
-          <a:xfrm>
-            <a:off x="1828800" y="2697480"/>
-            <a:ext cx="8229600" cy="548640"/>
-          </a:xfrm>
-          <a:prstGeom prst="rect">
-            <a:avLst/>
-          </a:prstGeom>
-          <a:noFill/>
-        </p:spPr>
-        <p:txBody>
-          <a:bodyPr wrap="square">
-            <a:spAutoFit/>
-          </a:bodyPr>
-          <a:lstStyle/>
-          <a:p>
-            <a:pPr algn="ctr"/>
-            <a:r>
-              <a:rPr sz="2400" b="0" i="0">
-                <a:solidFill>
-                  <a:srgbClr val="9B8AFF"/>
-                </a:solidFill>
-                <a:latin typeface="Malgun Gothic"/>
-              </a:rPr>
-              <a:t>2주 무료 파일럿 프로그램 신청</a:t>
-            </a:r>
-          </a:p>
-        </p:txBody>
-      </p:sp>
-      <p:sp>
-        <p:nvSpPr>
-          <p:cNvPr id="8" name="TextBox 7"/>
-          <p:cNvSpPr txBox="1"/>
-          <p:nvPr/>
-        </p:nvSpPr>
-        <p:spPr>
-          <a:xfrm>
-            <a:off x="1828800" y="3291840"/>
-            <a:ext cx="8229600" cy="365760"/>
-          </a:xfrm>
-          <a:prstGeom prst="rect">
-            <a:avLst/>
-          </a:prstGeom>
-          <a:noFill/>
-        </p:spPr>
-        <p:txBody>
-          <a:bodyPr wrap="square">
-            <a:spAutoFit/>
-          </a:bodyPr>
-          <a:lstStyle/>
-          <a:p>
-            <a:pPr algn="ctr"/>
-            <a:r>
-              <a:rPr sz="1600" b="0" i="0">
-                <a:solidFill>
-                  <a:srgbClr val="F4F4F8"/>
-                </a:solidFill>
-                <a:latin typeface="Malgun Gothic"/>
-              </a:rPr>
-              <a:t>실제 데이터로 CleverTap의 가치를 직접 확인하세요</a:t>
-            </a:r>
-          </a:p>
-        </p:txBody>
-      </p:sp>
-      <p:sp>
-        <p:nvSpPr>
-          <p:cNvPr id="9" name="Rectangle 8"/>
+          <p:cNvPr id="6" name="Rectangle 5"/>
           <p:cNvSpPr/>
           <p:nvPr/>
         </p:nvSpPr>
         <p:spPr>
           <a:xfrm>
-            <a:off x="4114800" y="4023360"/>
-            <a:ext cx="3657600" cy="594360"/>
+            <a:off x="1371600" y="1371600"/>
+            <a:ext cx="9144000" cy="64008"/>
           </a:xfrm>
           <a:prstGeom prst="rect">
             <a:avLst/>
@@ -11386,7 +11195,155 @@
       </p:sp>
       <p:sp>
         <p:nvSpPr>
-          <p:cNvPr id="10" name="TextBox 9"/>
+          <p:cNvPr id="7" name="TextBox 6"/>
+          <p:cNvSpPr txBox="1"/>
+          <p:nvPr/>
+        </p:nvSpPr>
+        <p:spPr>
+          <a:xfrm>
+            <a:off x="1828800" y="1828800"/>
+            <a:ext cx="8229600" cy="822960"/>
+          </a:xfrm>
+          <a:prstGeom prst="rect">
+            <a:avLst/>
+          </a:prstGeom>
+          <a:noFill/>
+        </p:spPr>
+        <p:txBody>
+          <a:bodyPr wrap="square">
+            <a:spAutoFit/>
+          </a:bodyPr>
+          <a:lstStyle/>
+          <a:p>
+            <a:pPr algn="ctr"/>
+            <a:r>
+              <a:rPr sz="4000" b="1" i="0">
+                <a:solidFill>
+                  <a:srgbClr val="FFFFFF"/>
+                </a:solidFill>
+                <a:latin typeface="Malgun Gothic"/>
+              </a:rPr>
+              <a:t>지금 바로 시작하세요</a:t>
+            </a:r>
+          </a:p>
+        </p:txBody>
+      </p:sp>
+      <p:sp>
+        <p:nvSpPr>
+          <p:cNvPr id="8" name="TextBox 7"/>
+          <p:cNvSpPr txBox="1"/>
+          <p:nvPr/>
+        </p:nvSpPr>
+        <p:spPr>
+          <a:xfrm>
+            <a:off x="1828800" y="2697480"/>
+            <a:ext cx="8229600" cy="548640"/>
+          </a:xfrm>
+          <a:prstGeom prst="rect">
+            <a:avLst/>
+          </a:prstGeom>
+          <a:noFill/>
+        </p:spPr>
+        <p:txBody>
+          <a:bodyPr wrap="square">
+            <a:spAutoFit/>
+          </a:bodyPr>
+          <a:lstStyle/>
+          <a:p>
+            <a:pPr algn="ctr"/>
+            <a:r>
+              <a:rPr sz="2400" b="0" i="0">
+                <a:solidFill>
+                  <a:srgbClr val="9B8AFF"/>
+                </a:solidFill>
+                <a:latin typeface="Malgun Gothic"/>
+              </a:rPr>
+              <a:t>2주 무료 파일럿 프로그램 신청</a:t>
+            </a:r>
+          </a:p>
+        </p:txBody>
+      </p:sp>
+      <p:sp>
+        <p:nvSpPr>
+          <p:cNvPr id="9" name="TextBox 8"/>
+          <p:cNvSpPr txBox="1"/>
+          <p:nvPr/>
+        </p:nvSpPr>
+        <p:spPr>
+          <a:xfrm>
+            <a:off x="1828800" y="3291840"/>
+            <a:ext cx="8229600" cy="365760"/>
+          </a:xfrm>
+          <a:prstGeom prst="rect">
+            <a:avLst/>
+          </a:prstGeom>
+          <a:noFill/>
+        </p:spPr>
+        <p:txBody>
+          <a:bodyPr wrap="square">
+            <a:spAutoFit/>
+          </a:bodyPr>
+          <a:lstStyle/>
+          <a:p>
+            <a:pPr algn="ctr"/>
+            <a:r>
+              <a:rPr sz="1600" b="0" i="0">
+                <a:solidFill>
+                  <a:srgbClr val="F4F4F8"/>
+                </a:solidFill>
+                <a:latin typeface="Malgun Gothic"/>
+              </a:rPr>
+              <a:t>실제 데이터로 CleverTap의 가치를 직접 확인하세요</a:t>
+            </a:r>
+          </a:p>
+        </p:txBody>
+      </p:sp>
+      <p:sp>
+        <p:nvSpPr>
+          <p:cNvPr id="10" name="Rectangle 9"/>
+          <p:cNvSpPr/>
+          <p:nvPr/>
+        </p:nvSpPr>
+        <p:spPr>
+          <a:xfrm>
+            <a:off x="4114800" y="4023360"/>
+            <a:ext cx="3657600" cy="594360"/>
+          </a:xfrm>
+          <a:prstGeom prst="rect">
+            <a:avLst/>
+          </a:prstGeom>
+          <a:solidFill>
+            <a:srgbClr val="6B4EFF"/>
+          </a:solidFill>
+          <a:ln>
+            <a:noFill/>
+          </a:ln>
+        </p:spPr>
+        <p:style>
+          <a:lnRef idx="1">
+            <a:schemeClr val="accent1"/>
+          </a:lnRef>
+          <a:fillRef idx="3">
+            <a:schemeClr val="accent1"/>
+          </a:fillRef>
+          <a:effectRef idx="2">
+            <a:schemeClr val="accent1"/>
+          </a:effectRef>
+          <a:fontRef idx="minor">
+            <a:schemeClr val="lt1"/>
+          </a:fontRef>
+        </p:style>
+        <p:txBody>
+          <a:bodyPr rtlCol="0" anchor="ctr"/>
+          <a:lstStyle/>
+          <a:p>
+            <a:pPr algn="ctr"/>
+          </a:p>
+        </p:txBody>
+      </p:sp>
+      <p:sp>
+        <p:nvSpPr>
+          <p:cNvPr id="11" name="TextBox 10"/>
           <p:cNvSpPr txBox="1"/>
           <p:nvPr/>
         </p:nvSpPr>
@@ -11414,14 +11371,14 @@
                 </a:solidFill>
                 <a:latin typeface="Malgun Gothic"/>
               </a:rPr>
-              <a:t>데모 신청하기  →</a:t>
-            </a:r>
-          </a:p>
-        </p:txBody>
-      </p:sp>
-      <p:sp>
-        <p:nvSpPr>
-          <p:cNvPr id="11" name="TextBox 10"/>
+              <a:t>데모 신청하기  -&gt;</a:t>
+            </a:r>
+          </a:p>
+        </p:txBody>
+      </p:sp>
+      <p:sp>
+        <p:nvSpPr>
+          <p:cNvPr id="12" name="TextBox 11"/>
           <p:cNvSpPr txBox="1"/>
           <p:nvPr/>
         </p:nvSpPr>
@@ -11456,7 +11413,7 @@
       </p:sp>
       <p:sp>
         <p:nvSpPr>
-          <p:cNvPr id="12" name="TextBox 11"/>
+          <p:cNvPr id="13" name="TextBox 12"/>
           <p:cNvSpPr txBox="1"/>
           <p:nvPr/>
         </p:nvSpPr>
@@ -11491,7 +11448,7 @@
       </p:sp>
       <p:sp>
         <p:nvSpPr>
-          <p:cNvPr id="13" name="TextBox 12"/>
+          <p:cNvPr id="14" name="TextBox 13"/>
           <p:cNvSpPr txBox="1"/>
           <p:nvPr/>
         </p:nvSpPr>
@@ -11526,7 +11483,7 @@
       </p:sp>
       <p:sp>
         <p:nvSpPr>
-          <p:cNvPr id="14" name="TextBox 13"/>
+          <p:cNvPr id="15" name="TextBox 14"/>
           <p:cNvSpPr txBox="1"/>
           <p:nvPr/>
         </p:nvSpPr>
@@ -11561,7 +11518,7 @@
       </p:sp>
       <p:sp>
         <p:nvSpPr>
-          <p:cNvPr id="15" name="TextBox 14"/>
+          <p:cNvPr id="16" name="TextBox 15"/>
           <p:cNvSpPr txBox="1"/>
           <p:nvPr/>
         </p:nvSpPr>
@@ -11596,7 +11553,7 @@
       </p:sp>
       <p:sp>
         <p:nvSpPr>
-          <p:cNvPr id="16" name="TextBox 15"/>
+          <p:cNvPr id="17" name="TextBox 16"/>
           <p:cNvSpPr txBox="1"/>
           <p:nvPr/>
         </p:nvSpPr>
@@ -11631,7 +11588,7 @@
       </p:sp>
       <p:sp>
         <p:nvSpPr>
-          <p:cNvPr id="17" name="TextBox 16"/>
+          <p:cNvPr id="18" name="TextBox 17"/>
           <p:cNvSpPr txBox="1"/>
           <p:nvPr/>
         </p:nvSpPr>
@@ -14543,7 +14500,7 @@
       </p:sp>
       <p:pic>
         <p:nvPicPr>
-          <p:cNvPr id="32" name="Picture 31" descr="screenshot_product_s1_y1800.png"/>
+          <p:cNvPr id="32" name="Picture 31" descr="ctx_intro.png"/>
           <p:cNvPicPr>
             <a:picLocks noChangeAspect="1"/>
           </p:cNvPicPr>
@@ -14595,7 +14552,7 @@
                 </a:solidFill>
                 <a:latin typeface="Malgun Gothic"/>
               </a:rPr>
-              <a:t>CleverTap 4대 핵심 플랫폼 — 분석·실험·개인화·오케스트레이션</a:t>
+              <a:t>CleverTap 통합 플랫폼 — Analytics · AI · Campaign · Journeys</a:t>
             </a:r>
           </a:p>
         </p:txBody>
@@ -16223,7 +16180,7 @@
       </p:sp>
       <p:pic>
         <p:nvPicPr>
-          <p:cNvPr id="43" name="Picture 42" descr="screenshot_customers_page_y300.png"/>
+          <p:cNvPr id="43" name="Picture 42" descr="ctx_customers.png"/>
           <p:cNvPicPr>
             <a:picLocks noChangeAspect="1"/>
           </p:cNvPicPr>
@@ -16275,7 +16232,7 @@
                 </a:solidFill>
                 <a:latin typeface="Malgun Gothic"/>
               </a:rPr>
-              <a:t>전 세계 고객사 분포 — Dream11·Kotak·7-Eleven·Levi's 등</a:t>
+              <a:t>10,000+ 글로벌 브랜드 — 전 세계 100개국 서비스</a:t>
             </a:r>
           </a:p>
         </p:txBody>
@@ -18418,7 +18375,7 @@
       </p:sp>
       <p:pic>
         <p:nvPicPr>
-          <p:cNvPr id="27" name="Picture 26" descr="screenshot_product_s1_y1300.png"/>
+          <p:cNvPr id="27" name="Picture 26" descr="ctx_architecture.png"/>
           <p:cNvPicPr>
             <a:picLocks noChangeAspect="1"/>
           </p:cNvPicPr>
@@ -18470,7 +18427,7 @@
                 </a:solidFill>
                 <a:latin typeface="Malgun Gothic"/>
               </a:rPr>
-              <a:t>Customer Data &amp; Analytics · Experimentation · Personalization · Orchestration</a:t>
+              <a:t>Journey Orchestration — 실시간 자동화 워크플로우 빌더</a:t>
             </a:r>
           </a:p>
         </p:txBody>
@@ -19474,7 +19431,7 @@
       </p:sp>
       <p:pic>
         <p:nvPicPr>
-          <p:cNvPr id="27" name="Picture 26" descr="screenshot_product_s1_y3000.png"/>
+          <p:cNvPr id="27" name="Picture 26" descr="ctx_analytics.png"/>
           <p:cNvPicPr>
             <a:picLocks noChangeAspect="1"/>
           </p:cNvPicPr>
@@ -19489,7 +19446,7 @@
         <p:spPr>
           <a:xfrm>
             <a:off x="6492240" y="1554480"/>
-            <a:ext cx="5212080" cy="2931795"/>
+            <a:ext cx="5212080" cy="2968442"/>
           </a:xfrm>
           <a:prstGeom prst="rect">
             <a:avLst/>
@@ -19526,7 +19483,7 @@
                 </a:solidFill>
                 <a:latin typeface="Malgun Gothic"/>
               </a:rPr>
-              <a:t>CleverTap Customer Data &amp; Analytics — 고객 프로필 기반 실시간 분석</a:t>
+              <a:t>Analytics Dashboard — 퍼널 분석 · 리텐션 트렌드 실시간 조회</a:t>
             </a:r>
           </a:p>
         </p:txBody>
@@ -20378,7 +20335,7 @@
       </p:sp>
       <p:pic>
         <p:nvPicPr>
-          <p:cNvPr id="23" name="Picture 22" descr="screenshot_product_s1_y2400.png"/>
+          <p:cNvPr id="23" name="Picture 22" descr="ctx_segmentation.png"/>
           <p:cNvPicPr>
             <a:picLocks noChangeAspect="1"/>
           </p:cNvPicPr>
@@ -20430,7 +20387,7 @@
                 </a:solidFill>
                 <a:latin typeface="Malgun Gothic"/>
               </a:rPr>
-              <a:t>CleverTap 세그멘테이션 · 개인화 · 오케스트레이션 통합 플랫폼</a:t>
+              <a:t>Segment Builder — Dynamic/RFM/Predictive 세그먼트 실시간 구성</a:t>
             </a:r>
           </a:p>
         </p:txBody>
@@ -21590,7 +21547,7 @@
       </p:sp>
       <p:pic>
         <p:nvPicPr>
-          <p:cNvPr id="31" name="Picture 30" descr="screenshot_engagement.png"/>
+          <p:cNvPr id="31" name="Picture 30" descr="ctx_engagement.png"/>
           <p:cNvPicPr>
             <a:picLocks noChangeAspect="1"/>
           </p:cNvPicPr>
@@ -21605,7 +21562,7 @@
         <p:spPr>
           <a:xfrm>
             <a:off x="6492240" y="1554480"/>
-            <a:ext cx="5212080" cy="3257550"/>
+            <a:ext cx="5212080" cy="2931795"/>
           </a:xfrm>
           <a:prstGeom prst="rect">
             <a:avLst/>
@@ -21642,7 +21599,7 @@
                 </a:solidFill>
                 <a:latin typeface="Malgun Gothic"/>
               </a:rPr>
-              <a:t>clevertap.com/omnichannel-engagement — 멀티채널 캠페인 실행</a:t>
+              <a:t>Campaign Manager — 옴니채널 캠페인 성과 실시간 모니터링</a:t>
             </a:r>
           </a:p>
         </p:txBody>
